--- a/dist/초2/도덕·윤리/정직과약속/초2_도덕·윤리_정직과약속_01_정직과약속_학생용.pptx
+++ b/dist/초2/도덕·윤리/정직과약속/초2_도덕·윤리_정직과약속_01_정직과약속_학생용.pptx
@@ -119,13 +119,13 @@
   <p:extLst>
     <p:ext uri="{521415D9-36F7-43E2-AB2F-B90AF26B5E84}">
       <p14:sectionLst xmlns:p14="http://schemas.microsoft.com/office/powerpoint/2010/main">
-        <p14:section name="도입" id="{e4c112a4-ed53-8f26-87d8-67b9200788db}">
+        <p14:section name="도입" id="{43903717-3589-073f-aaf9-859ebb1363c9}">
           <p14:sldIdLst>
             <p14:sldId id="256"/>
             <p14:sldId id="257"/>
           </p14:sldIdLst>
         </p14:section>
-        <p14:section name="개념" id="{8027f363-27b0-ba87-dec8-fd043eba4bdf}">
+        <p14:section name="개념" id="{4795e89e-7ff4-e0f1-ae4d-c09dfbae2f89}">
           <p14:sldIdLst>
             <p14:sldId id="258"/>
             <p14:sldId id="259"/>
@@ -133,37 +133,37 @@
             <p14:sldId id="263"/>
           </p14:sldIdLst>
         </p14:section>
-        <p14:section name="연습" id="{50319fa2-e2e7-267a-fc08-1bc575ce567f}">
+        <p14:section name="연습" id="{90ad6883-43ea-7601-e807-ac33fa7e2bd1}">
           <p14:sldIdLst>
             <p14:sldId id="260"/>
             <p14:sldId id="262"/>
             <p14:sldId id="264"/>
           </p14:sldIdLst>
         </p14:section>
-        <p14:section name="개념" id="{aeb95d0e-46b6-4ba9-6d99-cfa20ad56462}">
+        <p14:section name="개념" id="{4625d9b8-c68d-f9c5-73d0-b6193642785a}">
           <p14:sldIdLst/>
         </p14:section>
-        <p14:section name="연습" id="{e28ec7f9-f4a3-920f-4865-726f98a6c565}">
+        <p14:section name="연습" id="{6ace76ec-dff4-686e-34f5-e6ddc56cb1b4}">
           <p14:sldIdLst/>
         </p14:section>
-        <p14:section name="개념" id="{be5da1e8-c18b-a0d7-d25d-c25a2df02ffd}">
+        <p14:section name="개념" id="{c17bf13a-e533-cf46-b765-ee7ce3d1f913}">
           <p14:sldIdLst/>
         </p14:section>
-        <p14:section name="연습" id="{df99590f-a116-197d-ec78-43e72b51d2d2}">
+        <p14:section name="연습" id="{29e829f2-0e90-0ec1-2ad8-0a587e3fd304}">
           <p14:sldIdLst/>
         </p14:section>
-        <p14:section name="확인" id="{1e15e9de-d040-ac9c-acae-c6c3204156cd}">
+        <p14:section name="확인" id="{c8e1d516-cb0f-b433-f575-68e52a630550}">
           <p14:sldIdLst>
             <p14:sldId id="265"/>
             <p14:sldId id="266"/>
           </p14:sldIdLst>
         </p14:section>
-        <p14:section name="정리" id="{f2126ec3-f872-763e-8de4-6c5ed57e3928}">
+        <p14:section name="정리" id="{af60f4f3-53fa-dac8-216b-aed8f02a08d2}">
           <p14:sldIdLst>
             <p14:sldId id="267"/>
           </p14:sldIdLst>
         </p14:section>
-        <p14:section name="보충" id="{77bd6d54-e60a-84e1-0d90-1dcf2a438040}">
+        <p14:section name="보충" id="{8ee476a2-4c5e-f864-e49c-ac4914df9032}">
           <p14:sldIdLst>
             <p14:sldId id="268"/>
           </p14:sldIdLst>

--- a/dist/초2/도덕·윤리/정직과약속/초2_도덕·윤리_정직과약속_01_정직과약속_학생용.pptx
+++ b/dist/초2/도덕·윤리/정직과약속/초2_도덕·윤리_정직과약속_01_정직과약속_학생용.pptx
@@ -119,13 +119,13 @@
   <p:extLst>
     <p:ext uri="{521415D9-36F7-43E2-AB2F-B90AF26B5E84}">
       <p14:sectionLst xmlns:p14="http://schemas.microsoft.com/office/powerpoint/2010/main">
-        <p14:section name="도입" id="{43903717-3589-073f-aaf9-859ebb1363c9}">
+        <p14:section name="도입" id="{268b44c9-5d1b-b6e2-12c9-f685853e039a}">
           <p14:sldIdLst>
             <p14:sldId id="256"/>
             <p14:sldId id="257"/>
           </p14:sldIdLst>
         </p14:section>
-        <p14:section name="개념" id="{4795e89e-7ff4-e0f1-ae4d-c09dfbae2f89}">
+        <p14:section name="개념" id="{4e2a26a4-0409-fe00-1d27-b1955ffdad28}">
           <p14:sldIdLst>
             <p14:sldId id="258"/>
             <p14:sldId id="259"/>
@@ -133,37 +133,37 @@
             <p14:sldId id="263"/>
           </p14:sldIdLst>
         </p14:section>
-        <p14:section name="연습" id="{90ad6883-43ea-7601-e807-ac33fa7e2bd1}">
+        <p14:section name="연습" id="{3c285411-9fcf-2504-003a-644c63a4d172}">
           <p14:sldIdLst>
             <p14:sldId id="260"/>
             <p14:sldId id="262"/>
             <p14:sldId id="264"/>
           </p14:sldIdLst>
         </p14:section>
-        <p14:section name="개념" id="{4625d9b8-c68d-f9c5-73d0-b6193642785a}">
+        <p14:section name="개념" id="{7fde713d-2bfb-b057-4cf1-c90ec2d74fb0}">
           <p14:sldIdLst/>
         </p14:section>
-        <p14:section name="연습" id="{6ace76ec-dff4-686e-34f5-e6ddc56cb1b4}">
+        <p14:section name="연습" id="{7446ee87-bfaf-ede5-3a40-22fe6cab4b81}">
           <p14:sldIdLst/>
         </p14:section>
-        <p14:section name="개념" id="{c17bf13a-e533-cf46-b765-ee7ce3d1f913}">
+        <p14:section name="개념" id="{55a0488c-3c6d-5cf5-daf8-1b543a62c0c4}">
           <p14:sldIdLst/>
         </p14:section>
-        <p14:section name="연습" id="{29e829f2-0e90-0ec1-2ad8-0a587e3fd304}">
+        <p14:section name="연습" id="{ce69959d-300d-d581-d95f-04774b975f40}">
           <p14:sldIdLst/>
         </p14:section>
-        <p14:section name="확인" id="{c8e1d516-cb0f-b433-f575-68e52a630550}">
+        <p14:section name="확인" id="{8f9456f8-04b3-f9a6-e54c-4410eb841f7a}">
           <p14:sldIdLst>
             <p14:sldId id="265"/>
             <p14:sldId id="266"/>
           </p14:sldIdLst>
         </p14:section>
-        <p14:section name="정리" id="{af60f4f3-53fa-dac8-216b-aed8f02a08d2}">
+        <p14:section name="정리" id="{9535f55d-9600-0c9f-d7f7-892cc8a8bf34}">
           <p14:sldIdLst>
             <p14:sldId id="267"/>
           </p14:sldIdLst>
         </p14:section>
-        <p14:section name="보충" id="{8ee476a2-4c5e-f864-e49c-ac4914df9032}">
+        <p14:section name="보충" id="{d06541f2-9888-bb9f-6a49-4208c0776bbe}">
           <p14:sldIdLst>
             <p14:sldId id="268"/>
           </p14:sldIdLst>
